--- a/apps/web-playground/public/samples/03-tech-spec.pptx
+++ b/apps/web-playground/public/samples/03-tech-spec.pptx
@@ -2424,8 +2424,8 @@
         </p:nvSpPr>
         <p:spPr>
           <a:xfrm>
-            <a:off x="533400" y="2428875"/>
-            <a:ext cx="1714500" cy="123825"/>
+            <a:off x="533400" y="2457450"/>
+            <a:ext cx="1714500" cy="95250"/>
           </a:xfrm>
           <a:prstGeom prst="rect">
             <a:avLst/>
@@ -2528,8 +2528,8 @@
         </p:nvSpPr>
         <p:spPr>
           <a:xfrm>
-            <a:off x="533400" y="2714625"/>
-            <a:ext cx="1714500" cy="123825"/>
+            <a:off x="533400" y="2743200"/>
+            <a:ext cx="1714500" cy="95250"/>
           </a:xfrm>
           <a:prstGeom prst="rect">
             <a:avLst/>
@@ -2632,8 +2632,8 @@
         </p:nvSpPr>
         <p:spPr>
           <a:xfrm>
-            <a:off x="533400" y="3000375"/>
-            <a:ext cx="1714500" cy="123825"/>
+            <a:off x="533400" y="3028950"/>
+            <a:ext cx="1714500" cy="95250"/>
           </a:xfrm>
           <a:prstGeom prst="rect">
             <a:avLst/>
@@ -2736,8 +2736,8 @@
         </p:nvSpPr>
         <p:spPr>
           <a:xfrm>
-            <a:off x="533400" y="3286125"/>
-            <a:ext cx="1714500" cy="123825"/>
+            <a:off x="533400" y="3314700"/>
+            <a:ext cx="1714500" cy="95250"/>
           </a:xfrm>
           <a:prstGeom prst="rect">
             <a:avLst/>
@@ -3509,7 +3509,7 @@
       </p:sp>
       <p:sp>
         <p:nvSpPr>
-          <p:cNvPr id="7" name="Shape 5"/>
+          <p:cNvPr id="7"/>
           <p:cNvSpPr/>
           <p:nvPr/>
         </p:nvSpPr>
@@ -3615,7 +3615,7 @@
       </p:sp>
       <p:sp>
         <p:nvSpPr>
-          <p:cNvPr id="10" name="Shape 8"/>
+          <p:cNvPr id="10"/>
           <p:cNvSpPr/>
           <p:nvPr/>
         </p:nvSpPr>
@@ -3726,7 +3726,7 @@
       </p:sp>
       <p:sp>
         <p:nvSpPr>
-          <p:cNvPr id="13" name="Shape 11"/>
+          <p:cNvPr id="13"/>
           <p:cNvSpPr/>
           <p:nvPr/>
         </p:nvSpPr>
@@ -3837,7 +3837,7 @@
       </p:sp>
       <p:sp>
         <p:nvSpPr>
-          <p:cNvPr id="16" name="Shape 14"/>
+          <p:cNvPr id="16"/>
           <p:cNvSpPr/>
           <p:nvPr/>
         </p:nvSpPr>
@@ -3948,7 +3948,7 @@
       </p:sp>
       <p:sp>
         <p:nvSpPr>
-          <p:cNvPr id="19" name="Shape 17"/>
+          <p:cNvPr id="19"/>
           <p:cNvSpPr/>
           <p:nvPr/>
         </p:nvSpPr>
@@ -4059,7 +4059,7 @@
       </p:sp>
       <p:sp>
         <p:nvSpPr>
-          <p:cNvPr id="22" name="Shape 20"/>
+          <p:cNvPr id="22"/>
           <p:cNvSpPr/>
           <p:nvPr/>
         </p:nvSpPr>
@@ -4170,7 +4170,7 @@
       </p:sp>
       <p:sp>
         <p:nvSpPr>
-          <p:cNvPr id="25" name="Shape 23"/>
+          <p:cNvPr id="25"/>
           <p:cNvSpPr/>
           <p:nvPr/>
         </p:nvSpPr>
@@ -4281,7 +4281,7 @@
       </p:sp>
       <p:sp>
         <p:nvSpPr>
-          <p:cNvPr id="28" name="Shape 26"/>
+          <p:cNvPr id="28"/>
           <p:cNvSpPr/>
           <p:nvPr/>
         </p:nvSpPr>
@@ -4392,7 +4392,7 @@
       </p:sp>
       <p:sp>
         <p:nvSpPr>
-          <p:cNvPr id="31" name="Shape 29"/>
+          <p:cNvPr id="31"/>
           <p:cNvSpPr/>
           <p:nvPr/>
         </p:nvSpPr>
@@ -4503,7 +4503,7 @@
       </p:sp>
       <p:sp>
         <p:nvSpPr>
-          <p:cNvPr id="34" name="Shape 32"/>
+          <p:cNvPr id="34"/>
           <p:cNvSpPr/>
           <p:nvPr/>
         </p:nvSpPr>
@@ -4614,7 +4614,7 @@
       </p:sp>
       <p:sp>
         <p:nvSpPr>
-          <p:cNvPr id="37" name="Shape 35"/>
+          <p:cNvPr id="37"/>
           <p:cNvSpPr/>
           <p:nvPr/>
         </p:nvSpPr>
@@ -4723,18 +4723,21 @@
           </a:p>
         </p:txBody>
       </p:sp>
-      <p:sp>
-        <p:nvSpPr>
-          <p:cNvPr id="40" name="Shape 38"/>
-          <p:cNvSpPr/>
-          <p:nvPr/>
-        </p:nvSpPr>
+      <p:cxnSp>
+        <p:nvCxnSpPr>
+          <p:cNvPr id="40"/>
+          <p:cNvCxnSpPr>
+            <a:stCxn id="7" idx="2"/>
+            <a:endCxn id="10" idx="0"/>
+          </p:cNvCxnSpPr>
+          <p:nvPr/>
+        </p:nvCxnSpPr>
         <p:spPr>
           <a:xfrm flipH="1">
-            <a:off x="2438400" y="2543175"/>
-            <a:ext cx="3905250" cy="190500"/>
-          </a:xfrm>
-          <a:prstGeom prst="line">
+            <a:off x="2438400" y="2524125"/>
+            <a:ext cx="3905250" cy="209550"/>
+          </a:xfrm>
+          <a:prstGeom prst="straightConnector1">
             <a:avLst/>
           </a:prstGeom>
           <a:noFill/>
@@ -4745,19 +4748,22 @@
             <a:prstDash val="solid"/>
           </a:ln>
         </p:spPr>
-      </p:sp>
-      <p:sp>
-        <p:nvSpPr>
-          <p:cNvPr id="41" name="Shape 39"/>
-          <p:cNvSpPr/>
-          <p:nvPr/>
-        </p:nvSpPr>
+      </p:cxnSp>
+      <p:cxnSp>
+        <p:nvCxnSpPr>
+          <p:cNvPr id="41"/>
+          <p:cNvCxnSpPr>
+            <a:stCxn id="7" idx="2"/>
+            <a:endCxn id="13" idx="0"/>
+          </p:cNvCxnSpPr>
+          <p:nvPr/>
+        </p:nvCxnSpPr>
         <p:spPr>
           <a:xfrm flipH="1">
-            <a:off x="4343400" y="2543175"/>
-            <a:ext cx="2000250" cy="190500"/>
-          </a:xfrm>
-          <a:prstGeom prst="line">
+            <a:off x="4343400" y="2524125"/>
+            <a:ext cx="2000250" cy="209550"/>
+          </a:xfrm>
+          <a:prstGeom prst="straightConnector1">
             <a:avLst/>
           </a:prstGeom>
           <a:noFill/>
@@ -4768,19 +4774,22 @@
             <a:prstDash val="solid"/>
           </a:ln>
         </p:spPr>
-      </p:sp>
-      <p:sp>
-        <p:nvSpPr>
-          <p:cNvPr id="42" name="Shape 40"/>
-          <p:cNvSpPr/>
-          <p:nvPr/>
-        </p:nvSpPr>
-        <p:spPr>
-          <a:xfrm>
-            <a:off x="6343650" y="2543175"/>
-            <a:ext cx="95250" cy="190500"/>
-          </a:xfrm>
-          <a:prstGeom prst="line">
+      </p:cxnSp>
+      <p:cxnSp>
+        <p:nvCxnSpPr>
+          <p:cNvPr id="42"/>
+          <p:cNvCxnSpPr>
+            <a:stCxn id="7" idx="2"/>
+            <a:endCxn id="16" idx="0"/>
+          </p:cNvCxnSpPr>
+          <p:nvPr/>
+        </p:nvCxnSpPr>
+        <p:spPr>
+          <a:xfrm>
+            <a:off x="6343650" y="2524125"/>
+            <a:ext cx="95250" cy="209550"/>
+          </a:xfrm>
+          <a:prstGeom prst="straightConnector1">
             <a:avLst/>
           </a:prstGeom>
           <a:noFill/>
@@ -4791,19 +4800,22 @@
             <a:prstDash val="solid"/>
           </a:ln>
         </p:spPr>
-      </p:sp>
-      <p:sp>
-        <p:nvSpPr>
-          <p:cNvPr id="43" name="Shape 41"/>
-          <p:cNvSpPr/>
-          <p:nvPr/>
-        </p:nvSpPr>
-        <p:spPr>
-          <a:xfrm>
-            <a:off x="6343650" y="2543175"/>
-            <a:ext cx="2190750" cy="190500"/>
-          </a:xfrm>
-          <a:prstGeom prst="line">
+      </p:cxnSp>
+      <p:cxnSp>
+        <p:nvCxnSpPr>
+          <p:cNvPr id="43"/>
+          <p:cNvCxnSpPr>
+            <a:stCxn id="7" idx="2"/>
+            <a:endCxn id="19" idx="0"/>
+          </p:cNvCxnSpPr>
+          <p:nvPr/>
+        </p:nvCxnSpPr>
+        <p:spPr>
+          <a:xfrm>
+            <a:off x="6343650" y="2524125"/>
+            <a:ext cx="2190750" cy="209550"/>
+          </a:xfrm>
+          <a:prstGeom prst="straightConnector1">
             <a:avLst/>
           </a:prstGeom>
           <a:noFill/>
@@ -4814,19 +4826,22 @@
             <a:prstDash val="solid"/>
           </a:ln>
         </p:spPr>
-      </p:sp>
-      <p:sp>
-        <p:nvSpPr>
-          <p:cNvPr id="44" name="Shape 42"/>
-          <p:cNvSpPr/>
-          <p:nvPr/>
-        </p:nvSpPr>
-        <p:spPr>
-          <a:xfrm>
-            <a:off x="6343650" y="2543175"/>
-            <a:ext cx="4286250" cy="190500"/>
-          </a:xfrm>
-          <a:prstGeom prst="line">
+      </p:cxnSp>
+      <p:cxnSp>
+        <p:nvCxnSpPr>
+          <p:cNvPr id="44"/>
+          <p:cNvCxnSpPr>
+            <a:stCxn id="7" idx="2"/>
+            <a:endCxn id="22" idx="0"/>
+          </p:cNvCxnSpPr>
+          <p:nvPr/>
+        </p:nvCxnSpPr>
+        <p:spPr>
+          <a:xfrm>
+            <a:off x="6343650" y="2524125"/>
+            <a:ext cx="4286250" cy="209550"/>
+          </a:xfrm>
+          <a:prstGeom prst="straightConnector1">
             <a:avLst/>
           </a:prstGeom>
           <a:noFill/>
@@ -4837,19 +4852,22 @@
             <a:prstDash val="solid"/>
           </a:ln>
         </p:spPr>
-      </p:sp>
-      <p:sp>
-        <p:nvSpPr>
-          <p:cNvPr id="45" name="Shape 43"/>
-          <p:cNvSpPr/>
-          <p:nvPr/>
-        </p:nvSpPr>
-        <p:spPr>
-          <a:xfrm>
-            <a:off x="2438400" y="3190875"/>
-            <a:ext cx="0" cy="190500"/>
-          </a:xfrm>
-          <a:prstGeom prst="line">
+      </p:cxnSp>
+      <p:cxnSp>
+        <p:nvCxnSpPr>
+          <p:cNvPr id="45"/>
+          <p:cNvCxnSpPr>
+            <a:stCxn id="10" idx="2"/>
+            <a:endCxn id="25" idx="0"/>
+          </p:cNvCxnSpPr>
+          <p:nvPr/>
+        </p:nvCxnSpPr>
+        <p:spPr>
+          <a:xfrm>
+            <a:off x="2438400" y="3171825"/>
+            <a:ext cx="0" cy="209550"/>
+          </a:xfrm>
+          <a:prstGeom prst="straightConnector1">
             <a:avLst/>
           </a:prstGeom>
           <a:noFill/>
@@ -4860,19 +4878,22 @@
             <a:prstDash val="solid"/>
           </a:ln>
         </p:spPr>
-      </p:sp>
-      <p:sp>
-        <p:nvSpPr>
-          <p:cNvPr id="46" name="Shape 44"/>
-          <p:cNvSpPr/>
-          <p:nvPr/>
-        </p:nvSpPr>
-        <p:spPr>
-          <a:xfrm>
-            <a:off x="4343400" y="3190875"/>
-            <a:ext cx="0" cy="190500"/>
-          </a:xfrm>
-          <a:prstGeom prst="line">
+      </p:cxnSp>
+      <p:cxnSp>
+        <p:nvCxnSpPr>
+          <p:cNvPr id="46"/>
+          <p:cNvCxnSpPr>
+            <a:stCxn id="13" idx="2"/>
+            <a:endCxn id="28" idx="0"/>
+          </p:cNvCxnSpPr>
+          <p:nvPr/>
+        </p:nvCxnSpPr>
+        <p:spPr>
+          <a:xfrm>
+            <a:off x="4343400" y="3171825"/>
+            <a:ext cx="0" cy="209550"/>
+          </a:xfrm>
+          <a:prstGeom prst="straightConnector1">
             <a:avLst/>
           </a:prstGeom>
           <a:noFill/>
@@ -4883,19 +4904,22 @@
             <a:prstDash val="solid"/>
           </a:ln>
         </p:spPr>
-      </p:sp>
-      <p:sp>
-        <p:nvSpPr>
-          <p:cNvPr id="47" name="Shape 45"/>
-          <p:cNvSpPr/>
-          <p:nvPr/>
-        </p:nvSpPr>
-        <p:spPr>
-          <a:xfrm>
-            <a:off x="6438900" y="3190875"/>
-            <a:ext cx="0" cy="190500"/>
-          </a:xfrm>
-          <a:prstGeom prst="line">
+      </p:cxnSp>
+      <p:cxnSp>
+        <p:nvCxnSpPr>
+          <p:cNvPr id="47"/>
+          <p:cNvCxnSpPr>
+            <a:stCxn id="16" idx="2"/>
+            <a:endCxn id="31" idx="0"/>
+          </p:cNvCxnSpPr>
+          <p:nvPr/>
+        </p:nvCxnSpPr>
+        <p:spPr>
+          <a:xfrm>
+            <a:off x="6438900" y="3171825"/>
+            <a:ext cx="0" cy="209550"/>
+          </a:xfrm>
+          <a:prstGeom prst="straightConnector1">
             <a:avLst/>
           </a:prstGeom>
           <a:noFill/>
@@ -4906,19 +4930,22 @@
             <a:prstDash val="solid"/>
           </a:ln>
         </p:spPr>
-      </p:sp>
-      <p:sp>
-        <p:nvSpPr>
-          <p:cNvPr id="48" name="Shape 46"/>
-          <p:cNvSpPr/>
-          <p:nvPr/>
-        </p:nvSpPr>
-        <p:spPr>
-          <a:xfrm>
-            <a:off x="8534400" y="3190875"/>
-            <a:ext cx="0" cy="190500"/>
-          </a:xfrm>
-          <a:prstGeom prst="line">
+      </p:cxnSp>
+      <p:cxnSp>
+        <p:nvCxnSpPr>
+          <p:cNvPr id="48"/>
+          <p:cNvCxnSpPr>
+            <a:stCxn id="19" idx="2"/>
+            <a:endCxn id="34" idx="0"/>
+          </p:cNvCxnSpPr>
+          <p:nvPr/>
+        </p:nvCxnSpPr>
+        <p:spPr>
+          <a:xfrm>
+            <a:off x="8534400" y="3171825"/>
+            <a:ext cx="0" cy="209550"/>
+          </a:xfrm>
+          <a:prstGeom prst="straightConnector1">
             <a:avLst/>
           </a:prstGeom>
           <a:noFill/>
@@ -4929,19 +4956,22 @@
             <a:prstDash val="solid"/>
           </a:ln>
         </p:spPr>
-      </p:sp>
-      <p:sp>
-        <p:nvSpPr>
-          <p:cNvPr id="49" name="Shape 47"/>
-          <p:cNvSpPr/>
-          <p:nvPr/>
-        </p:nvSpPr>
-        <p:spPr>
-          <a:xfrm>
-            <a:off x="10629900" y="3190875"/>
-            <a:ext cx="0" cy="190500"/>
-          </a:xfrm>
-          <a:prstGeom prst="line">
+      </p:cxnSp>
+      <p:cxnSp>
+        <p:nvCxnSpPr>
+          <p:cNvPr id="49"/>
+          <p:cNvCxnSpPr>
+            <a:stCxn id="22" idx="2"/>
+            <a:endCxn id="37" idx="0"/>
+          </p:cNvCxnSpPr>
+          <p:nvPr/>
+        </p:nvCxnSpPr>
+        <p:spPr>
+          <a:xfrm>
+            <a:off x="10629900" y="3171825"/>
+            <a:ext cx="0" cy="209550"/>
+          </a:xfrm>
+          <a:prstGeom prst="straightConnector1">
             <a:avLst/>
           </a:prstGeom>
           <a:noFill/>
@@ -4952,7 +4982,7 @@
             <a:prstDash val="solid"/>
           </a:ln>
         </p:spPr>
-      </p:sp>
+      </p:cxnSp>
       <p:sp>
         <p:nvSpPr>
           <p:cNvPr id="50" name="Shape 48"/>
@@ -6439,8 +6469,8 @@
         </p:nvSpPr>
         <p:spPr>
           <a:xfrm>
-            <a:off x="7372350" y="4438650"/>
-            <a:ext cx="1714500" cy="123825"/>
+            <a:off x="7372350" y="4467225"/>
+            <a:ext cx="1714500" cy="95250"/>
           </a:xfrm>
           <a:prstGeom prst="rect">
             <a:avLst/>
@@ -6543,8 +6573,8 @@
         </p:nvSpPr>
         <p:spPr>
           <a:xfrm>
-            <a:off x="7372350" y="4705350"/>
-            <a:ext cx="1714500" cy="123825"/>
+            <a:off x="7372350" y="4733925"/>
+            <a:ext cx="1714500" cy="95250"/>
           </a:xfrm>
           <a:prstGeom prst="rect">
             <a:avLst/>
@@ -6647,8 +6677,8 @@
         </p:nvSpPr>
         <p:spPr>
           <a:xfrm>
-            <a:off x="7372350" y="4972050"/>
-            <a:ext cx="1714500" cy="123825"/>
+            <a:off x="7372350" y="5000625"/>
+            <a:ext cx="1714500" cy="95250"/>
           </a:xfrm>
           <a:prstGeom prst="rect">
             <a:avLst/>
@@ -6751,8 +6781,8 @@
         </p:nvSpPr>
         <p:spPr>
           <a:xfrm>
-            <a:off x="7372350" y="5238750"/>
-            <a:ext cx="1714500" cy="123825"/>
+            <a:off x="7372350" y="5267325"/>
+            <a:ext cx="1714500" cy="95250"/>
           </a:xfrm>
           <a:prstGeom prst="rect">
             <a:avLst/>
